--- a/Royal-Crown final.pptx
+++ b/Royal-Crown final.pptx
@@ -1759,9 +1759,8 @@
         </p:nvPicPr>
         <p:blipFill>
           <a:blip r:embed="rId2"/>
-          <a:stretch>
-            <a:fillRect/>
-          </a:stretch>
+          <a:srcRect/>
+          <a:stretch/>
         </p:blipFill>
         <p:spPr>
           <a:xfrm>
@@ -1819,9 +1818,8 @@
         </p:nvPicPr>
         <p:blipFill>
           <a:blip r:embed="rId2"/>
-          <a:stretch>
-            <a:fillRect/>
-          </a:stretch>
+          <a:srcRect/>
+          <a:stretch/>
         </p:blipFill>
         <p:spPr>
           <a:xfrm>
@@ -6612,9 +6610,8 @@
         </p:nvPicPr>
         <p:blipFill>
           <a:blip r:embed="rId3"/>
-          <a:stretch>
-            <a:fillRect/>
-          </a:stretch>
+          <a:srcRect/>
+          <a:stretch/>
         </p:blipFill>
         <p:spPr>
           <a:xfrm>
